--- a/Deliverables/presentation.pptx
+++ b/Deliverables/presentation.pptx
@@ -15,8 +15,6 @@
     <p:sldId id="263" r:id="rId14"/>
     <p:sldId id="264" r:id="rId15"/>
     <p:sldId id="265" r:id="rId16"/>
-    <p:sldId id="266" r:id="rId17"/>
-    <p:sldId id="267" r:id="rId18"/>
   </p:sldIdLst>
   <p:sldSz cx="12191695" cy="6858000" type="screen4x3"/>
   <p:notesSz cx="6858000" cy="9144000"/>
@@ -3095,7 +3093,7 @@
     <p:bg>
       <p:bgPr>
         <a:solidFill>
-          <a:srgbClr val="FFFFFF"/>
+          <a:srgbClr val="FFFCF7"/>
         </a:solidFill>
         <a:effectLst/>
       </p:bgPr>
@@ -3115,8 +3113,8 @@
         </p:nvSpPr>
         <p:spPr>
           <a:xfrm>
-            <a:off x="502920" y="292608"/>
-            <a:ext cx="11155680" cy="960120"/>
+            <a:off x="411480" y="201168"/>
+            <a:ext cx="11338560" cy="640080"/>
           </a:xfrm>
           <a:prstGeom prst="rect">
             <a:avLst/>
@@ -3130,13 +3128,13 @@
           <a:lstStyle/>
           <a:p>
             <a:r>
-              <a:rPr sz="3200">
-                <a:solidFill>
-                  <a:srgbClr val="141414"/>
+              <a:rPr sz="3000" b="1">
+                <a:solidFill>
+                  <a:srgbClr val="1C1917"/>
                 </a:solidFill>
                 <a:latin typeface="Calibri"/>
               </a:rPr>
-              <a:t>Integer multiplication</a:t>
+              <a:t>OpenAiMul.c</a:t>
             </a:r>
           </a:p>
         </p:txBody>
@@ -3149,8 +3147,8 @@
         </p:nvSpPr>
         <p:spPr>
           <a:xfrm>
-            <a:off x="502920" y="1417320"/>
-            <a:ext cx="11064240" cy="4937760"/>
+            <a:off x="548640" y="1188720"/>
+            <a:ext cx="11064240" cy="5120640"/>
           </a:xfrm>
           <a:prstGeom prst="rect">
             <a:avLst/>
@@ -3165,49 +3163,65 @@
           <a:p>
             <a:pPr>
               <a:spcAft>
-                <a:spcPts val="1000"/>
+                <a:spcPts val="1400"/>
               </a:spcAft>
             </a:pPr>
             <a:r>
-              <a:rPr sz="2200">
-                <a:solidFill>
-                  <a:srgbClr val="141414"/>
+              <a:rPr sz="2800" b="0">
+                <a:solidFill>
+                  <a:srgbClr val="1C1917"/>
                 </a:solidFill>
                 <a:latin typeface="Calibri"/>
               </a:rPr>
-              <a:t>41052 Programming Assignment 2</a:t>
+              <a:t>Bailey Tucker  24744334</a:t>
             </a:r>
           </a:p>
           <a:p>
             <a:pPr>
               <a:spcAft>
-                <a:spcPts val="1000"/>
+                <a:spcPts val="1400"/>
               </a:spcAft>
             </a:pPr>
             <a:r>
-              <a:rPr sz="2200">
-                <a:solidFill>
-                  <a:srgbClr val="141414"/>
+              <a:rPr sz="2800" b="0">
+                <a:solidFill>
+                  <a:srgbClr val="1C1917"/>
                 </a:solidFill>
                 <a:latin typeface="Calibri"/>
               </a:rPr>
-              <a:t>Bailey Tucker, Jack McCowan, Mukund Srinivasan</a:t>
+              <a:t>Two n-limb integers in.  2n-limb product out.</a:t>
             </a:r>
           </a:p>
           <a:p>
             <a:pPr>
               <a:spcAft>
-                <a:spcPts val="1000"/>
+                <a:spcPts val="1400"/>
               </a:spcAft>
             </a:pPr>
             <a:r>
-              <a:rPr sz="2200">
-                <a:solidFill>
-                  <a:srgbClr val="141414"/>
+              <a:rPr sz="2800" b="0">
+                <a:solidFill>
+                  <a:srgbClr val="1C1917"/>
                 </a:solidFill>
                 <a:latin typeface="Calibri"/>
               </a:rPr>
-              <a:t>Hard cap: 15 minutes</a:t>
+              <a:t>Same contract as GMP mpn_mul_n.</a:t>
+            </a:r>
+          </a:p>
+          <a:p>
+            <a:pPr>
+              <a:spcAft>
+                <a:spcPts val="1400"/>
+              </a:spcAft>
+            </a:pPr>
+            <a:r>
+              <a:rPr sz="2800" b="0">
+                <a:solidFill>
+                  <a:srgbClr val="1C1917"/>
+                </a:solidFill>
+                <a:latin typeface="Calibri"/>
+              </a:rPr>
+              <a:t>About 4 minutes.</a:t>
             </a:r>
           </a:p>
         </p:txBody>
@@ -3226,7 +3240,7 @@
     <p:bg>
       <p:bgPr>
         <a:solidFill>
-          <a:srgbClr val="FFFFFF"/>
+          <a:srgbClr val="FFFCF7"/>
         </a:solidFill>
         <a:effectLst/>
       </p:bgPr>
@@ -3246,8 +3260,8 @@
         </p:nvSpPr>
         <p:spPr>
           <a:xfrm>
-            <a:off x="502920" y="292608"/>
-            <a:ext cx="11155680" cy="960120"/>
+            <a:off x="411480" y="201168"/>
+            <a:ext cx="11338560" cy="640080"/>
           </a:xfrm>
           <a:prstGeom prst="rect">
             <a:avLst/>
@@ -3261,13 +3275,13 @@
           <a:lstStyle/>
           <a:p>
             <a:r>
-              <a:rPr sz="3200">
-                <a:solidFill>
-                  <a:srgbClr val="141414"/>
+              <a:rPr sz="3000" b="1">
+                <a:solidFill>
+                  <a:srgbClr val="1C1917"/>
                 </a:solidFill>
                 <a:latin typeface="Calibri"/>
               </a:rPr>
-              <a:t>Bailey's harness, through 16,384 limbs</a:t>
+              <a:t>Why the FFT falls behind, and what is next</a:t>
             </a:r>
           </a:p>
         </p:txBody>
@@ -3280,8 +3294,8 @@
         </p:nvSpPr>
         <p:spPr>
           <a:xfrm>
-            <a:off x="502920" y="1417320"/>
-            <a:ext cx="5760720" cy="4937760"/>
+            <a:off x="548640" y="1188720"/>
+            <a:ext cx="11064240" cy="5120640"/>
           </a:xfrm>
           <a:prstGeom prst="rect">
             <a:avLst/>
@@ -3296,383 +3310,81 @@
           <a:p>
             <a:pPr>
               <a:spcAft>
-                <a:spcPts val="1000"/>
+                <a:spcPts val="1400"/>
               </a:spcAft>
             </a:pPr>
             <a:r>
-              <a:rPr sz="2200">
-                <a:solidFill>
-                  <a:srgbClr val="141414"/>
+              <a:rPr sz="2400" b="0">
+                <a:solidFill>
+                  <a:srgbClr val="1C1917"/>
                 </a:solidFill>
                 <a:latin typeface="Calibri"/>
               </a:rPr>
-              <a:t>Ryzen 7 6800H, GMP 6.3.0.</a:t>
+              <a:t>Above 2,048 limbs the FFT uses 8-bit digits, so its transform is longer.</a:t>
             </a:r>
           </a:p>
           <a:p>
             <a:pPr>
               <a:spcAft>
-                <a:spcPts val="1000"/>
+                <a:spcPts val="1400"/>
               </a:spcAft>
             </a:pPr>
             <a:r>
-              <a:rPr sz="2200">
-                <a:solidFill>
-                  <a:srgbClr val="141414"/>
+              <a:rPr sz="2400" b="0">
+                <a:solidFill>
+                  <a:srgbClr val="1C1917"/>
                 </a:solidFill>
                 <a:latin typeface="Calibri"/>
               </a:rPr>
-              <a:t>GMP is fastest on every row.</a:t>
+              <a:t>Mine stays on 16-bit digits. On this run I only edge it at 16,384 limbs.</a:t>
             </a:r>
           </a:p>
           <a:p>
             <a:pPr>
               <a:spcAft>
-                <a:spcPts val="1000"/>
+                <a:spcPts val="1400"/>
               </a:spcAft>
             </a:pPr>
             <a:r>
-              <a:rPr sz="2200">
-                <a:solidFill>
-                  <a:srgbClr val="141414"/>
+              <a:rPr sz="2400" b="0">
+                <a:solidFill>
+                  <a:srgbClr val="1C1917"/>
                 </a:solidFill>
                 <a:latin typeface="Calibri"/>
               </a:rPr>
-              <a:t>OpenAI passes schoolbook at 4,096 limbs.</a:t>
+              <a:t>Karatsuba is faster than both of those at that size.</a:t>
             </a:r>
           </a:p>
           <a:p>
             <a:pPr>
               <a:spcAft>
-                <a:spcPts val="1000"/>
+                <a:spcPts val="1400"/>
               </a:spcAft>
             </a:pPr>
             <a:r>
-              <a:rPr sz="2200">
-                <a:solidFill>
-                  <a:srgbClr val="141414"/>
+              <a:rPr sz="2400" b="0">
+                <a:solidFill>
+                  <a:srgbClr val="1C1917"/>
                 </a:solidFill>
                 <a:latin typeface="Calibri"/>
               </a:rPr>
-              <a:t>OpenAI passes the FFT at 8,192 limbs.</a:t>
+              <a:t>Next: build the twiddle powers in setup, outside the timer.</a:t>
             </a:r>
           </a:p>
           <a:p>
             <a:pPr>
               <a:spcAft>
-                <a:spcPts val="1000"/>
+                <a:spcPts val="1400"/>
               </a:spcAft>
             </a:pPr>
             <a:r>
-              <a:rPr sz="2200">
-                <a:solidFill>
-                  <a:srgbClr val="141414"/>
+              <a:rPr sz="2400" b="0">
+                <a:solidFill>
+                  <a:srgbClr val="1C1917"/>
                 </a:solidFill>
                 <a:latin typeface="Calibri"/>
               </a:rPr>
-              <a:t>At 16,384: GMP 2.9 ms, OpenAI 43 ms, FFT 66 ms.</a:t>
-            </a:r>
-          </a:p>
-        </p:txBody>
-      </p:sp>
-      <p:pic>
-        <p:nvPicPr>
-          <p:cNvPr id="4" name="Picture 3" descr="timing-plot.png"/>
-          <p:cNvPicPr>
-            <a:picLocks noChangeAspect="1"/>
-          </p:cNvPicPr>
-          <p:nvPr/>
-        </p:nvPicPr>
-        <p:blipFill>
-          <a:blip r:embed="rId2"/>
-          <a:stretch>
-            <a:fillRect/>
-          </a:stretch>
-        </p:blipFill>
-        <p:spPr>
-          <a:xfrm>
-            <a:off x="6446520" y="1554480"/>
-            <a:ext cx="5212080" cy="2923850"/>
-          </a:xfrm>
-          <a:prstGeom prst="rect">
-            <a:avLst/>
-          </a:prstGeom>
-        </p:spPr>
-      </p:pic>
-    </p:spTree>
-  </p:cSld>
-  <p:clrMapOvr>
-    <a:masterClrMapping/>
-  </p:clrMapOvr>
-</p:sld>
-</file>
-
-<file path=ppt/slides/slide11.xml><?xml version="1.0" encoding="utf-8"?>
-<p:sld xmlns:a="http://schemas.openxmlformats.org/drawingml/2006/main" xmlns:p="http://schemas.openxmlformats.org/presentationml/2006/main" xmlns:r="http://schemas.openxmlformats.org/officeDocument/2006/relationships">
-  <p:cSld>
-    <p:bg>
-      <p:bgPr>
-        <a:solidFill>
-          <a:srgbClr val="FFFFFF"/>
-        </a:solidFill>
-        <a:effectLst/>
-      </p:bgPr>
-    </p:bg>
-    <p:spTree>
-      <p:nvGrpSpPr>
-        <p:cNvPr id="1" name=""/>
-        <p:cNvGrpSpPr/>
-        <p:nvPr/>
-      </p:nvGrpSpPr>
-      <p:grpSpPr/>
-      <p:sp>
-        <p:nvSpPr>
-          <p:cNvPr id="2" name="TextBox 1"/>
-          <p:cNvSpPr txBox="1"/>
-          <p:nvPr/>
-        </p:nvSpPr>
-        <p:spPr>
-          <a:xfrm>
-            <a:off x="502920" y="292608"/>
-            <a:ext cx="11155680" cy="960120"/>
-          </a:xfrm>
-          <a:prstGeom prst="rect">
-            <a:avLst/>
-          </a:prstGeom>
-          <a:noFill/>
-        </p:spPr>
-        <p:txBody>
-          <a:bodyPr wrap="square">
-            <a:spAutoFit/>
-          </a:bodyPr>
-          <a:lstStyle/>
-          <a:p>
-            <a:r>
-              <a:rPr sz="3200">
-                <a:solidFill>
-                  <a:srgbClr val="141414"/>
-                </a:solidFill>
-                <a:latin typeface="Calibri"/>
-              </a:rPr>
-              <a:t>Two surprises</a:t>
-            </a:r>
-          </a:p>
-        </p:txBody>
-      </p:sp>
-      <p:sp>
-        <p:nvSpPr>
-          <p:cNvPr id="3" name="TextBox 2"/>
-          <p:cNvSpPr txBox="1"/>
-          <p:nvPr/>
-        </p:nvSpPr>
-        <p:spPr>
-          <a:xfrm>
-            <a:off x="502920" y="1417320"/>
-            <a:ext cx="11064240" cy="4937760"/>
-          </a:xfrm>
-          <a:prstGeom prst="rect">
-            <a:avLst/>
-          </a:prstGeom>
-          <a:noFill/>
-        </p:spPr>
-        <p:txBody>
-          <a:bodyPr wrap="square">
-            <a:spAutoFit/>
-          </a:bodyPr>
-          <a:lstStyle/>
-          <a:p>
-            <a:pPr>
-              <a:spcAft>
-                <a:spcPts val="1000"/>
-              </a:spcAft>
-            </a:pPr>
-            <a:r>
-              <a:rPr sz="2200">
-                <a:solidFill>
-                  <a:srgbClr val="141414"/>
-                </a:solidFill>
-                <a:latin typeface="Calibri"/>
-              </a:rPr>
-              <a:t>Jack: the FFT did not pass Karatsuba until about 100,000 limbs.</a:t>
-            </a:r>
-          </a:p>
-          <a:p>
-            <a:pPr>
-              <a:spcAft>
-                <a:spcPts val="1000"/>
-              </a:spcAft>
-            </a:pPr>
-            <a:r>
-              <a:rPr sz="2200">
-                <a:solidFill>
-                  <a:srgbClr val="141414"/>
-                </a:solidFill>
-                <a:latin typeface="Calibri"/>
-              </a:rPr>
-              <a:t>Bailey: schoolbook was still ahead of OpenAI at 2,048 limbs.</a:t>
-            </a:r>
-          </a:p>
-          <a:p>
-            <a:pPr>
-              <a:spcAft>
-                <a:spcPts val="1000"/>
-              </a:spcAft>
-            </a:pPr>
-            <a:r>
-              <a:rPr sz="2200">
-                <a:solidFill>
-                  <a:srgbClr val="141414"/>
-                </a:solidFill>
-                <a:latin typeface="Calibri"/>
-              </a:rPr>
-              <a:t>Bailey: the FFT stays ahead only through 4,096 limbs.</a:t>
-            </a:r>
-          </a:p>
-          <a:p>
-            <a:pPr>
-              <a:spcAft>
-                <a:spcPts val="1000"/>
-              </a:spcAft>
-            </a:pPr>
-            <a:r>
-              <a:rPr sz="2200">
-                <a:solidFill>
-                  <a:srgbClr val="141414"/>
-                </a:solidFill>
-                <a:latin typeface="Calibri"/>
-              </a:rPr>
-              <a:t>Neither of our files catches GMP.</a:t>
-            </a:r>
-          </a:p>
-        </p:txBody>
-      </p:sp>
-    </p:spTree>
-  </p:cSld>
-  <p:clrMapOvr>
-    <a:masterClrMapping/>
-  </p:clrMapOvr>
-</p:sld>
-</file>
-
-<file path=ppt/slides/slide12.xml><?xml version="1.0" encoding="utf-8"?>
-<p:sld xmlns:a="http://schemas.openxmlformats.org/drawingml/2006/main" xmlns:p="http://schemas.openxmlformats.org/presentationml/2006/main" xmlns:r="http://schemas.openxmlformats.org/officeDocument/2006/relationships">
-  <p:cSld>
-    <p:bg>
-      <p:bgPr>
-        <a:solidFill>
-          <a:srgbClr val="FFFFFF"/>
-        </a:solidFill>
-        <a:effectLst/>
-      </p:bgPr>
-    </p:bg>
-    <p:spTree>
-      <p:nvGrpSpPr>
-        <p:cNvPr id="1" name=""/>
-        <p:cNvGrpSpPr/>
-        <p:nvPr/>
-      </p:nvGrpSpPr>
-      <p:grpSpPr/>
-      <p:sp>
-        <p:nvSpPr>
-          <p:cNvPr id="2" name="TextBox 1"/>
-          <p:cNvSpPr txBox="1"/>
-          <p:nvPr/>
-        </p:nvSpPr>
-        <p:spPr>
-          <a:xfrm>
-            <a:off x="502920" y="292608"/>
-            <a:ext cx="11155680" cy="960120"/>
-          </a:xfrm>
-          <a:prstGeom prst="rect">
-            <a:avLst/>
-          </a:prstGeom>
-          <a:noFill/>
-        </p:spPr>
-        <p:txBody>
-          <a:bodyPr wrap="square">
-            <a:spAutoFit/>
-          </a:bodyPr>
-          <a:lstStyle/>
-          <a:p>
-            <a:r>
-              <a:rPr sz="3200">
-                <a:solidFill>
-                  <a:srgbClr val="141414"/>
-                </a:solidFill>
-                <a:latin typeface="Calibri"/>
-              </a:rPr>
-              <a:t>Next</a:t>
-            </a:r>
-          </a:p>
-        </p:txBody>
-      </p:sp>
-      <p:sp>
-        <p:nvSpPr>
-          <p:cNvPr id="3" name="TextBox 2"/>
-          <p:cNvSpPr txBox="1"/>
-          <p:nvPr/>
-        </p:nvSpPr>
-        <p:spPr>
-          <a:xfrm>
-            <a:off x="502920" y="1417320"/>
-            <a:ext cx="11064240" cy="4937760"/>
-          </a:xfrm>
-          <a:prstGeom prst="rect">
-            <a:avLst/>
-          </a:prstGeom>
-          <a:noFill/>
-        </p:spPr>
-        <p:txBody>
-          <a:bodyPr wrap="square">
-            <a:spAutoFit/>
-          </a:bodyPr>
-          <a:lstStyle/>
-          <a:p>
-            <a:pPr>
-              <a:spcAft>
-                <a:spcPts val="1000"/>
-              </a:spcAft>
-            </a:pPr>
-            <a:r>
-              <a:rPr sz="2200">
-                <a:solidFill>
-                  <a:srgbClr val="141414"/>
-                </a:solidFill>
-                <a:latin typeface="Calibri"/>
-              </a:rPr>
-              <a:t>Build OpenAI twiddles in setup, outside the timer.</a:t>
-            </a:r>
-          </a:p>
-          <a:p>
-            <a:pPr>
-              <a:spcAft>
-                <a:spcPts val="1000"/>
-              </a:spcAft>
-            </a:pPr>
-            <a:r>
-              <a:rPr sz="2200">
-                <a:solidFill>
-                  <a:srgbClr val="141414"/>
-                </a:solidFill>
-                <a:latin typeface="Calibri"/>
-              </a:rPr>
-              <a:t>Put Karatsuba on the same harness rows.</a:t>
-            </a:r>
-          </a:p>
-          <a:p>
-            <a:pPr>
-              <a:spcAft>
-                <a:spcPts val="1000"/>
-              </a:spcAft>
-            </a:pPr>
-            <a:r>
-              <a:rPr sz="2200">
-                <a:solidFill>
-                  <a:srgbClr val="141414"/>
-                </a:solidFill>
-                <a:latin typeface="Calibri"/>
-              </a:rPr>
-              <a:t>A larger n will not make this OpenAI file catch GMP.</a:t>
+              <a:t>A larger n on this file will not catch GMP.</a:t>
             </a:r>
           </a:p>
         </p:txBody>
@@ -3691,7 +3403,7 @@
     <p:bg>
       <p:bgPr>
         <a:solidFill>
-          <a:srgbClr val="FFFFFF"/>
+          <a:srgbClr val="FFFCF7"/>
         </a:solidFill>
         <a:effectLst/>
       </p:bgPr>
@@ -3711,8 +3423,8 @@
         </p:nvSpPr>
         <p:spPr>
           <a:xfrm>
-            <a:off x="502920" y="292608"/>
-            <a:ext cx="11155680" cy="960120"/>
+            <a:off x="411480" y="201168"/>
+            <a:ext cx="11338560" cy="640080"/>
           </a:xfrm>
           <a:prstGeom prst="rect">
             <a:avLst/>
@@ -3726,13 +3438,13 @@
           <a:lstStyle/>
           <a:p>
             <a:r>
-              <a:rPr sz="3200">
-                <a:solidFill>
-                  <a:srgbClr val="141414"/>
+              <a:rPr sz="3000" b="1">
+                <a:solidFill>
+                  <a:srgbClr val="1C1917"/>
                 </a:solidFill>
                 <a:latin typeface="Calibri"/>
               </a:rPr>
-              <a:t>The problem</a:t>
+              <a:t>The paper, and this file</a:t>
             </a:r>
           </a:p>
         </p:txBody>
@@ -3745,8 +3457,8 @@
         </p:nvSpPr>
         <p:spPr>
           <a:xfrm>
-            <a:off x="502920" y="1417320"/>
-            <a:ext cx="11064240" cy="4937760"/>
+            <a:off x="548640" y="1188720"/>
+            <a:ext cx="11064240" cy="5120640"/>
           </a:xfrm>
           <a:prstGeom prst="rect">
             <a:avLst/>
@@ -3761,49 +3473,81 @@
           <a:p>
             <a:pPr>
               <a:spcAft>
-                <a:spcPts val="1000"/>
+                <a:spcPts val="1400"/>
               </a:spcAft>
             </a:pPr>
             <a:r>
-              <a:rPr sz="2200">
-                <a:solidFill>
-                  <a:srgbClr val="141414"/>
+              <a:rPr sz="2600" b="0">
+                <a:solidFill>
+                  <a:srgbClr val="1C1917"/>
                 </a:solidFill>
                 <a:latin typeface="Calibri"/>
               </a:rPr>
-              <a:t>Two n-limb integers, 64 bits per limb, little endian.</a:t>
+              <a:t>Preprint: 23 September 2026.</a:t>
             </a:r>
           </a:p>
           <a:p>
             <a:pPr>
               <a:spcAft>
-                <a:spcPts val="1000"/>
+                <a:spcPts val="1400"/>
               </a:spcAft>
             </a:pPr>
             <a:r>
-              <a:rPr sz="2200">
-                <a:solidFill>
-                  <a:srgbClr val="141414"/>
+              <a:rPr sz="2600" b="0">
+                <a:solidFill>
+                  <a:srgbClr val="1C1917"/>
                 </a:solidFill>
                 <a:latin typeface="Calibri"/>
               </a:rPr>
-              <a:t>Product is 2n limbs. Same contract as GMP mpn_mul_n.</a:t>
+              <a:t>Tape bound: kappa = 2^(-182).</a:t>
             </a:r>
           </a:p>
           <a:p>
             <a:pPr>
               <a:spcAft>
-                <a:spcPts val="1000"/>
+                <a:spcPts val="1400"/>
               </a:spcAft>
             </a:pPr>
             <a:r>
-              <a:rPr sz="2200">
-                <a:solidFill>
-                  <a:srgbClr val="141414"/>
+              <a:rPr sz="2600" b="0">
+                <a:solidFill>
+                  <a:srgbClr val="1C1917"/>
                 </a:solidFill>
                 <a:latin typeface="Calibri"/>
               </a:rPr>
-              <a:t>Question: where does the simple code win?</a:t>
+              <a:t>That machine uses schoolbook past a cutoff we cannot store.</a:t>
+            </a:r>
+          </a:p>
+          <a:p>
+            <a:pPr>
+              <a:spcAft>
+                <a:spcPts val="1400"/>
+              </a:spcAft>
+            </a:pPr>
+            <a:r>
+              <a:rPr sz="2600" b="0">
+                <a:solidFill>
+                  <a:srgbClr val="1C1917"/>
+                </a:solidFill>
+                <a:latin typeface="Calibri"/>
+              </a:rPr>
+              <a:t>log2(n) would have to pass 2^(2^75).</a:t>
+            </a:r>
+          </a:p>
+          <a:p>
+            <a:pPr>
+              <a:spcAft>
+                <a:spcPts val="1400"/>
+              </a:spcAft>
+            </a:pPr>
+            <a:r>
+              <a:rPr sz="2600" b="0">
+                <a:solidFill>
+                  <a:srgbClr val="1C1917"/>
+                </a:solidFill>
+                <a:latin typeface="Calibri"/>
+              </a:rPr>
+              <a:t>The timed function is a 16-bit digit convolution.</a:t>
             </a:r>
           </a:p>
         </p:txBody>
@@ -3822,7 +3566,7 @@
     <p:bg>
       <p:bgPr>
         <a:solidFill>
-          <a:srgbClr val="FFFFFF"/>
+          <a:srgbClr val="FFFCF7"/>
         </a:solidFill>
         <a:effectLst/>
       </p:bgPr>
@@ -3842,8 +3586,8 @@
         </p:nvSpPr>
         <p:spPr>
           <a:xfrm>
-            <a:off x="502920" y="292608"/>
-            <a:ext cx="11155680" cy="960120"/>
+            <a:off x="411480" y="201168"/>
+            <a:ext cx="11338560" cy="640080"/>
           </a:xfrm>
           <a:prstGeom prst="rect">
             <a:avLst/>
@@ -3857,27 +3601,51 @@
           <a:lstStyle/>
           <a:p>
             <a:r>
-              <a:rPr sz="3200">
-                <a:solidFill>
-                  <a:srgbClr val="141414"/>
+              <a:rPr sz="3000" b="1">
+                <a:solidFill>
+                  <a:srgbClr val="1C1917"/>
                 </a:solidFill>
                 <a:latin typeface="Calibri"/>
               </a:rPr>
-              <a:t>What we compare</a:t>
-            </a:r>
-          </a:p>
-        </p:txBody>
-      </p:sp>
-      <p:sp>
-        <p:nvSpPr>
-          <p:cNvPr id="3" name="TextBox 2"/>
+              <a:t>One limb, four digits</a:t>
+            </a:r>
+          </a:p>
+        </p:txBody>
+      </p:sp>
+      <p:pic>
+        <p:nvPicPr>
+          <p:cNvPr id="3" name="Picture 2" descr="limb.png"/>
+          <p:cNvPicPr>
+            <a:picLocks noChangeAspect="1"/>
+          </p:cNvPicPr>
+          <p:nvPr/>
+        </p:nvPicPr>
+        <p:blipFill>
+          <a:blip r:embed="rId2"/>
+          <a:stretch>
+            <a:fillRect/>
+          </a:stretch>
+        </p:blipFill>
+        <p:spPr>
+          <a:xfrm>
+            <a:off x="640080" y="960120"/>
+            <a:ext cx="10881360" cy="3264408"/>
+          </a:xfrm>
+          <a:prstGeom prst="rect">
+            <a:avLst/>
+          </a:prstGeom>
+        </p:spPr>
+      </p:pic>
+      <p:sp>
+        <p:nvSpPr>
+          <p:cNvPr id="4" name="TextBox 3"/>
           <p:cNvSpPr txBox="1"/>
           <p:nvPr/>
         </p:nvSpPr>
         <p:spPr>
           <a:xfrm>
-            <a:off x="502920" y="1417320"/>
-            <a:ext cx="11064240" cy="4937760"/>
+            <a:off x="411480" y="6263640"/>
+            <a:ext cx="11338560" cy="457200"/>
           </a:xfrm>
           <a:prstGeom prst="rect">
             <a:avLst/>
@@ -3890,83 +3658,14 @@
           </a:bodyPr>
           <a:lstStyle/>
           <a:p>
-            <a:pPr>
-              <a:spcAft>
-                <a:spcPts val="1000"/>
-              </a:spcAft>
-            </a:pPr>
-            <a:r>
-              <a:rPr sz="2200">
-                <a:solidFill>
-                  <a:srgbClr val="141414"/>
+            <a:r>
+              <a:rPr sz="1600" b="0">
+                <a:solidFill>
+                  <a:srgbClr val="57534E"/>
                 </a:solidFill>
                 <a:latin typeface="Calibri"/>
               </a:rPr>
-              <a:t>Schoolbook: Mukund. Theta(n^2).</a:t>
-            </a:r>
-          </a:p>
-          <a:p>
-            <a:pPr>
-              <a:spcAft>
-                <a:spcPts val="1000"/>
-              </a:spcAft>
-            </a:pPr>
-            <a:r>
-              <a:rPr sz="2200">
-                <a:solidFill>
-                  <a:srgbClr val="141414"/>
-                </a:solidFill>
-                <a:latin typeface="Calibri"/>
-              </a:rPr>
-              <a:t>Karatsuba: Jack. About n^1.585.</a:t>
-            </a:r>
-          </a:p>
-          <a:p>
-            <a:pPr>
-              <a:spcAft>
-                <a:spcPts val="1000"/>
-              </a:spcAft>
-            </a:pPr>
-            <a:r>
-              <a:rPr sz="2200">
-                <a:solidFill>
-                  <a:srgbClr val="141414"/>
-                </a:solidFill>
-                <a:latin typeface="Calibri"/>
-              </a:rPr>
-              <a:t>FFT: Mukund. Digits, then a complex FFT.</a:t>
-            </a:r>
-          </a:p>
-          <a:p>
-            <a:pPr>
-              <a:spcAft>
-                <a:spcPts val="1000"/>
-              </a:spcAft>
-            </a:pPr>
-            <a:r>
-              <a:rPr sz="2200">
-                <a:solidFill>
-                  <a:srgbClr val="141414"/>
-                </a:solidFill>
-                <a:latin typeface="Calibri"/>
-              </a:rPr>
-              <a:t>OpenAI file: Bailey. 16-bit digit convolution.</a:t>
-            </a:r>
-          </a:p>
-          <a:p>
-            <a:pPr>
-              <a:spcAft>
-                <a:spcPts val="1000"/>
-              </a:spcAft>
-            </a:pPr>
-            <a:r>
-              <a:rPr sz="2200">
-                <a:solidFill>
-                  <a:srgbClr val="141414"/>
-                </a:solidFill>
-                <a:latin typeface="Calibri"/>
-              </a:rPr>
-              <a:t>GMP: library baseline, not one of our algorithms.</a:t>
+              <a:t>Low digit is bits 0 to 15. Carry later moves in base 2^16.</a:t>
             </a:r>
           </a:p>
         </p:txBody>
@@ -3985,7 +3684,7 @@
     <p:bg>
       <p:bgPr>
         <a:solidFill>
-          <a:srgbClr val="FFFFFF"/>
+          <a:srgbClr val="FFFCF7"/>
         </a:solidFill>
         <a:effectLst/>
       </p:bgPr>
@@ -4005,8 +3704,8 @@
         </p:nvSpPr>
         <p:spPr>
           <a:xfrm>
-            <a:off x="502920" y="292608"/>
-            <a:ext cx="11155680" cy="960120"/>
+            <a:off x="411480" y="201168"/>
+            <a:ext cx="11338560" cy="640080"/>
           </a:xfrm>
           <a:prstGeom prst="rect">
             <a:avLst/>
@@ -4020,27 +3719,51 @@
           <a:lstStyle/>
           <a:p>
             <a:r>
-              <a:rPr sz="3200">
-                <a:solidFill>
-                  <a:srgbClr val="141414"/>
+              <a:rPr sz="3000" b="1">
+                <a:solidFill>
+                  <a:srgbClr val="1C1917"/>
                 </a:solidFill>
                 <a:latin typeface="Calibri"/>
               </a:rPr>
-              <a:t>Schoolbook</a:t>
-            </a:r>
-          </a:p>
-        </p:txBody>
-      </p:sp>
-      <p:sp>
-        <p:nvSpPr>
-          <p:cNvPr id="3" name="TextBox 2"/>
+              <a:t>What one call does</a:t>
+            </a:r>
+          </a:p>
+        </p:txBody>
+      </p:sp>
+      <p:pic>
+        <p:nvPicPr>
+          <p:cNvPr id="3" name="Picture 2" descr="flow.png"/>
+          <p:cNvPicPr>
+            <a:picLocks noChangeAspect="1"/>
+          </p:cNvPicPr>
+          <p:nvPr/>
+        </p:nvPicPr>
+        <p:blipFill>
+          <a:blip r:embed="rId2"/>
+          <a:stretch>
+            <a:fillRect/>
+          </a:stretch>
+        </p:blipFill>
+        <p:spPr>
+          <a:xfrm>
+            <a:off x="640080" y="960120"/>
+            <a:ext cx="10881360" cy="2831413"/>
+          </a:xfrm>
+          <a:prstGeom prst="rect">
+            <a:avLst/>
+          </a:prstGeom>
+        </p:spPr>
+      </p:pic>
+      <p:sp>
+        <p:nvSpPr>
+          <p:cNvPr id="4" name="TextBox 3"/>
           <p:cNvSpPr txBox="1"/>
           <p:nvPr/>
         </p:nvSpPr>
         <p:spPr>
           <a:xfrm>
-            <a:off x="502920" y="1417320"/>
-            <a:ext cx="11064240" cy="4937760"/>
+            <a:off x="411480" y="6263640"/>
+            <a:ext cx="11338560" cy="457200"/>
           </a:xfrm>
           <a:prstGeom prst="rect">
             <a:avLst/>
@@ -4053,67 +3776,14 @@
           </a:bodyPr>
           <a:lstStyle/>
           <a:p>
-            <a:pPr>
-              <a:spcAft>
-                <a:spcPts val="1000"/>
-              </a:spcAft>
-            </a:pPr>
-            <a:r>
-              <a:rPr sz="2200">
-                <a:solidFill>
-                  <a:srgbClr val="141414"/>
+            <a:r>
+              <a:rPr sz="1600" b="0">
+                <a:solidFill>
+                  <a:srgbClr val="57534E"/>
                 </a:solidFill>
                 <a:latin typeface="Calibri"/>
               </a:rPr>
-              <a:t>Limb i of a meets every limb of b at index i+j.</a:t>
-            </a:r>
-          </a:p>
-          <a:p>
-            <a:pPr>
-              <a:spcAft>
-                <a:spcPts val="1000"/>
-              </a:spcAft>
-            </a:pPr>
-            <a:r>
-              <a:rPr sz="2200">
-                <a:solidFill>
-                  <a:srgbClr val="141414"/>
-                </a:solidFill>
-                <a:latin typeface="Calibri"/>
-              </a:rPr>
-              <a:t>The high half of the 128-bit product is the carry.</a:t>
-            </a:r>
-          </a:p>
-          <a:p>
-            <a:pPr>
-              <a:spcAft>
-                <a:spcPts val="1000"/>
-              </a:spcAft>
-            </a:pPr>
-            <a:r>
-              <a:rPr sz="2200">
-                <a:solidFill>
-                  <a:srgbClr val="141414"/>
-                </a:solidFill>
-                <a:latin typeface="Calibri"/>
-              </a:rPr>
-              <a:t>Drop the carry and the next limb is short.</a:t>
-            </a:r>
-          </a:p>
-          <a:p>
-            <a:pPr>
-              <a:spcAft>
-                <a:spcPts val="1000"/>
-              </a:spcAft>
-            </a:pPr>
-            <a:r>
-              <a:rPr sz="2200">
-                <a:solidFill>
-                  <a:srgbClr val="141414"/>
-                </a:solidFill>
-                <a:latin typeface="Calibri"/>
-              </a:rPr>
-              <a:t>No extra buffer. Fast only while n is small.</a:t>
+              <a:t>Length of the transform is at least twice the digit count.</a:t>
             </a:r>
           </a:p>
         </p:txBody>
@@ -4132,7 +3802,7 @@
     <p:bg>
       <p:bgPr>
         <a:solidFill>
-          <a:srgbClr val="FFFFFF"/>
+          <a:srgbClr val="FFFCF7"/>
         </a:solidFill>
         <a:effectLst/>
       </p:bgPr>
@@ -4152,8 +3822,8 @@
         </p:nvSpPr>
         <p:spPr>
           <a:xfrm>
-            <a:off x="502920" y="292608"/>
-            <a:ext cx="11155680" cy="960120"/>
+            <a:off x="411480" y="201168"/>
+            <a:ext cx="11338560" cy="640080"/>
           </a:xfrm>
           <a:prstGeom prst="rect">
             <a:avLst/>
@@ -4167,27 +3837,51 @@
           <a:lstStyle/>
           <a:p>
             <a:r>
-              <a:rPr sz="3200">
-                <a:solidFill>
-                  <a:srgbClr val="141414"/>
+              <a:rPr sz="3000" b="1">
+                <a:solidFill>
+                  <a:srgbClr val="1C1917"/>
                 </a:solidFill>
                 <a:latin typeface="Calibri"/>
               </a:rPr>
-              <a:t>Karatsuba</a:t>
-            </a:r>
-          </a:p>
-        </p:txBody>
-      </p:sp>
-      <p:sp>
-        <p:nvSpPr>
-          <p:cNvPr id="3" name="TextBox 2"/>
+              <a:t>A product you can check by hand</a:t>
+            </a:r>
+          </a:p>
+        </p:txBody>
+      </p:sp>
+      <p:pic>
+        <p:nvPicPr>
+          <p:cNvPr id="3" name="Picture 2" descr="convolution.png"/>
+          <p:cNvPicPr>
+            <a:picLocks noChangeAspect="1"/>
+          </p:cNvPicPr>
+          <p:nvPr/>
+        </p:nvPicPr>
+        <p:blipFill>
+          <a:blip r:embed="rId2"/>
+          <a:stretch>
+            <a:fillRect/>
+          </a:stretch>
+        </p:blipFill>
+        <p:spPr>
+          <a:xfrm>
+            <a:off x="640080" y="960120"/>
+            <a:ext cx="10881360" cy="5965919"/>
+          </a:xfrm>
+          <a:prstGeom prst="rect">
+            <a:avLst/>
+          </a:prstGeom>
+        </p:spPr>
+      </p:pic>
+      <p:sp>
+        <p:nvSpPr>
+          <p:cNvPr id="4" name="TextBox 3"/>
           <p:cNvSpPr txBox="1"/>
           <p:nvPr/>
         </p:nvSpPr>
         <p:spPr>
           <a:xfrm>
-            <a:off x="502920" y="1417320"/>
-            <a:ext cx="11064240" cy="4937760"/>
+            <a:off x="411480" y="6263640"/>
+            <a:ext cx="11338560" cy="457200"/>
           </a:xfrm>
           <a:prstGeom prst="rect">
             <a:avLst/>
@@ -4200,83 +3894,14 @@
           </a:bodyPr>
           <a:lstStyle/>
           <a:p>
-            <a:pPr>
-              <a:spcAft>
-                <a:spcPts val="1000"/>
-              </a:spcAft>
-            </a:pPr>
-            <a:r>
-              <a:rPr sz="2200">
-                <a:solidFill>
-                  <a:srgbClr val="141414"/>
+            <a:r>
+              <a:rPr sz="1600" b="0">
+                <a:solidFill>
+                  <a:srgbClr val="57534E"/>
                 </a:solidFill>
                 <a:latin typeface="Calibri"/>
               </a:rPr>
-              <a:t>Three half-size products, not four.</a:t>
-            </a:r>
-          </a:p>
-          <a:p>
-            <a:pPr>
-              <a:spcAft>
-                <a:spcPts val="1000"/>
-              </a:spcAft>
-            </a:pPr>
-            <a:r>
-              <a:rPr sz="2200">
-                <a:solidFill>
-                  <a:srgbClr val="141414"/>
-                </a:solidFill>
-                <a:latin typeface="Calibri"/>
-              </a:rPr>
-              <a:t>Middle term uses a difference, not a sum.</a:t>
-            </a:r>
-          </a:p>
-          <a:p>
-            <a:pPr>
-              <a:spcAft>
-                <a:spcPts val="1000"/>
-              </a:spcAft>
-            </a:pPr>
-            <a:r>
-              <a:rPr sz="2200">
-                <a:solidFill>
-                  <a:srgbClr val="141414"/>
-                </a:solidFill>
-                <a:latin typeface="Calibri"/>
-              </a:rPr>
-              <a:t>A sum can grow an extra limb and the recursion stalls at n = 2 or 3.</a:t>
-            </a:r>
-          </a:p>
-          <a:p>
-            <a:pPr>
-              <a:spcAft>
-                <a:spcPts val="1000"/>
-              </a:spcAft>
-            </a:pPr>
-            <a:r>
-              <a:rPr sz="2200">
-                <a:solidFill>
-                  <a:srgbClr val="141414"/>
-                </a:solidFill>
-                <a:latin typeface="Calibri"/>
-              </a:rPr>
-              <a:t>Wrong sign still looks like a normal number.</a:t>
-            </a:r>
-          </a:p>
-          <a:p>
-            <a:pPr>
-              <a:spcAft>
-                <a:spcPts val="1000"/>
-              </a:spcAft>
-            </a:pPr>
-            <a:r>
-              <a:rPr sz="2200">
-                <a:solidFill>
-                  <a:srgbClr val="141414"/>
-                </a:solidFill>
-                <a:latin typeface="Calibri"/>
-              </a:rPr>
-              <a:t>Base case: schoolbook at 16 limbs.</a:t>
+              <a:t>21 + 68 x 2^16 + 55 x 2^32. No carry in this example.</a:t>
             </a:r>
           </a:p>
         </p:txBody>
@@ -4295,7 +3920,7 @@
     <p:bg>
       <p:bgPr>
         <a:solidFill>
-          <a:srgbClr val="FFFFFF"/>
+          <a:srgbClr val="FFFCF7"/>
         </a:solidFill>
         <a:effectLst/>
       </p:bgPr>
@@ -4315,8 +3940,8 @@
         </p:nvSpPr>
         <p:spPr>
           <a:xfrm>
-            <a:off x="502920" y="292608"/>
-            <a:ext cx="11155680" cy="960120"/>
+            <a:off x="411480" y="201168"/>
+            <a:ext cx="11338560" cy="640080"/>
           </a:xfrm>
           <a:prstGeom prst="rect">
             <a:avLst/>
@@ -4330,27 +3955,51 @@
           <a:lstStyle/>
           <a:p>
             <a:r>
-              <a:rPr sz="3200">
-                <a:solidFill>
-                  <a:srgbClr val="141414"/>
+              <a:rPr sz="3000" b="1">
+                <a:solidFill>
+                  <a:srgbClr val="1C1917"/>
                 </a:solidFill>
                 <a:latin typeface="Calibri"/>
               </a:rPr>
-              <a:t>Karatsuba, what we measured</a:t>
-            </a:r>
-          </a:p>
-        </p:txBody>
-      </p:sp>
-      <p:sp>
-        <p:nvSpPr>
-          <p:cNvPr id="3" name="TextBox 2"/>
+              <a:t>Length 2 writes a different integer</a:t>
+            </a:r>
+          </a:p>
+        </p:txBody>
+      </p:sp>
+      <p:pic>
+        <p:nvPicPr>
+          <p:cNvPr id="3" name="Picture 2" descr="break.png"/>
+          <p:cNvPicPr>
+            <a:picLocks noChangeAspect="1"/>
+          </p:cNvPicPr>
+          <p:nvPr/>
+        </p:nvPicPr>
+        <p:blipFill>
+          <a:blip r:embed="rId2"/>
+          <a:stretch>
+            <a:fillRect/>
+          </a:stretch>
+        </p:blipFill>
+        <p:spPr>
+          <a:xfrm>
+            <a:off x="640080" y="960120"/>
+            <a:ext cx="10881360" cy="3706746"/>
+          </a:xfrm>
+          <a:prstGeom prst="rect">
+            <a:avLst/>
+          </a:prstGeom>
+        </p:spPr>
+      </p:pic>
+      <p:sp>
+        <p:nvSpPr>
+          <p:cNvPr id="4" name="TextBox 3"/>
           <p:cNvSpPr txBox="1"/>
           <p:nvPr/>
         </p:nvSpPr>
         <p:spPr>
           <a:xfrm>
-            <a:off x="502920" y="1417320"/>
-            <a:ext cx="11064240" cy="4937760"/>
+            <a:off x="411480" y="6263640"/>
+            <a:ext cx="11338560" cy="457200"/>
           </a:xfrm>
           <a:prstGeom prst="rect">
             <a:avLst/>
@@ -4363,83 +4012,14 @@
           </a:bodyPr>
           <a:lstStyle/>
           <a:p>
-            <a:pPr>
-              <a:spcAft>
-                <a:spcPts val="1000"/>
-              </a:spcAft>
-            </a:pPr>
-            <a:r>
-              <a:rPr sz="2200">
-                <a:solidFill>
-                  <a:srgbClr val="141414"/>
+            <a:r>
+              <a:rPr sz="1600" b="0">
+                <a:solidFill>
+                  <a:srgbClr val="57534E"/>
                 </a:solidFill>
                 <a:latin typeface="Calibri"/>
               </a:rPr>
-              <a:t>Jack's machine: i9, GMP 6.2.1.</a:t>
-            </a:r>
-          </a:p>
-          <a:p>
-            <a:pPr>
-              <a:spcAft>
-                <a:spcPts val="1000"/>
-              </a:spcAft>
-            </a:pPr>
-            <a:r>
-              <a:rPr sz="2200">
-                <a:solidFill>
-                  <a:srgbClr val="141414"/>
-                </a:solidFill>
-                <a:latin typeface="Calibri"/>
-              </a:rPr>
-              <a:t>Beats schoolbook from about 18 limbs.</a:t>
-            </a:r>
-          </a:p>
-          <a:p>
-            <a:pPr>
-              <a:spcAft>
-                <a:spcPts val="1000"/>
-              </a:spcAft>
-            </a:pPr>
-            <a:r>
-              <a:rPr sz="2200">
-                <a:solidFill>
-                  <a:srgbClr val="141414"/>
-                </a:solidFill>
-                <a:latin typeface="Calibri"/>
-              </a:rPr>
-              <a:t>Cutoff 14 to 28 is within 3 percent of the best.</a:t>
-            </a:r>
-          </a:p>
-          <a:p>
-            <a:pPr>
-              <a:spcAft>
-                <a:spcPts val="1000"/>
-              </a:spcAft>
-            </a:pPr>
-            <a:r>
-              <a:rPr sz="2200">
-                <a:solidFill>
-                  <a:srgbClr val="141414"/>
-                </a:solidFill>
-                <a:latin typeface="Calibri"/>
-              </a:rPr>
-              <a:t>No sawtooth at the recursion boundaries.</a:t>
-            </a:r>
-          </a:p>
-          <a:p>
-            <a:pPr>
-              <a:spcAft>
-                <a:spcPts val="1000"/>
-              </a:spcAft>
-            </a:pPr>
-            <a:r>
-              <a:rPr sz="2200">
-                <a:solidFill>
-                  <a:srgbClr val="141414"/>
-                </a:solidFill>
-                <a:latin typeface="Calibri"/>
-              </a:rPr>
-              <a:t>FFT does not clearly pass it until about 100,000 limbs.</a:t>
+              <a:t>76 is 21 + 55. The carry cannot move the 55 back.</a:t>
             </a:r>
           </a:p>
         </p:txBody>
@@ -4458,7 +4038,7 @@
     <p:bg>
       <p:bgPr>
         <a:solidFill>
-          <a:srgbClr val="FFFFFF"/>
+          <a:srgbClr val="FFFCF7"/>
         </a:solidFill>
         <a:effectLst/>
       </p:bgPr>
@@ -4478,8 +4058,8 @@
         </p:nvSpPr>
         <p:spPr>
           <a:xfrm>
-            <a:off x="502920" y="292608"/>
-            <a:ext cx="11155680" cy="960120"/>
+            <a:off x="411480" y="201168"/>
+            <a:ext cx="11338560" cy="640080"/>
           </a:xfrm>
           <a:prstGeom prst="rect">
             <a:avLst/>
@@ -4493,13 +4073,13 @@
           <a:lstStyle/>
           <a:p>
             <a:r>
-              <a:rPr sz="3200">
-                <a:solidFill>
-                  <a:srgbClr val="141414"/>
+              <a:rPr sz="3000" b="1">
+                <a:solidFill>
+                  <a:srgbClr val="1C1917"/>
                 </a:solidFill>
                 <a:latin typeface="Calibri"/>
               </a:rPr>
-              <a:t>FFT</a:t>
+              <a:t>The invariant</a:t>
             </a:r>
           </a:p>
         </p:txBody>
@@ -4512,8 +4092,8 @@
         </p:nvSpPr>
         <p:spPr>
           <a:xfrm>
-            <a:off x="502920" y="1417320"/>
-            <a:ext cx="11064240" cy="4937760"/>
+            <a:off x="548640" y="1188720"/>
+            <a:ext cx="11064240" cy="5120640"/>
           </a:xfrm>
           <a:prstGeom prst="rect">
             <a:avLst/>
@@ -4528,65 +4108,81 @@
           <a:p>
             <a:pPr>
               <a:spcAft>
-                <a:spcPts val="1000"/>
+                <a:spcPts val="1400"/>
               </a:spcAft>
             </a:pPr>
             <a:r>
-              <a:rPr sz="2200">
-                <a:solidFill>
-                  <a:srgbClr val="141414"/>
+              <a:rPr sz="2600" b="0">
+                <a:solidFill>
+                  <a:srgbClr val="1C1917"/>
                 </a:solidFill>
                 <a:latin typeface="Calibri"/>
               </a:rPr>
-              <a:t>16-bit digits. 8-bit digits after 2048 limbs.</a:t>
+              <a:t>After the inverse transform, bucket k holds the digit products for shift k.</a:t>
             </a:r>
           </a:p>
           <a:p>
             <a:pPr>
               <a:spcAft>
-                <a:spcPts val="1000"/>
+                <a:spcPts val="1400"/>
               </a:spcAft>
             </a:pPr>
             <a:r>
-              <a:rPr sz="2200">
-                <a:solidFill>
-                  <a:srgbClr val="141414"/>
+              <a:rPr sz="2600" b="0">
+                <a:solidFill>
+                  <a:srgbClr val="1C1917"/>
                 </a:solidFill>
                 <a:latin typeface="Calibri"/>
               </a:rPr>
-              <a:t>Pad the transform to a power of two.</a:t>
+              <a:t>Nothing from a higher shift has wrapped in.</a:t>
             </a:r>
           </a:p>
           <a:p>
             <a:pPr>
               <a:spcAft>
-                <a:spcPts val="1000"/>
+                <a:spcPts val="1400"/>
               </a:spcAft>
             </a:pPr>
             <a:r>
-              <a:rPr sz="2200">
-                <a:solidFill>
-                  <a:srgbClr val="141414"/>
+              <a:rPr sz="2600" b="0">
+                <a:solidFill>
+                  <a:srgbClr val="1C1917"/>
                 </a:solidFill>
                 <a:latin typeface="Calibri"/>
               </a:rPr>
-              <a:t>Round to the nearest integer, then carry.</a:t>
+              <a:t>The sum is smaller than the modulus, so it has not wrapped modulo P.</a:t>
             </a:r>
           </a:p>
           <a:p>
             <a:pPr>
               <a:spcAft>
-                <a:spcPts val="1000"/>
+                <a:spcPts val="1400"/>
               </a:spcAft>
             </a:pPr>
             <a:r>
-              <a:rPr sz="2200">
-                <a:solidFill>
-                  <a:srgbClr val="141414"/>
+              <a:rPr sz="2600" b="0">
+                <a:solidFill>
+                  <a:srgbClr val="1C1917"/>
                 </a:solidFill>
                 <a:latin typeface="Calibri"/>
               </a:rPr>
-              <a:t>If the rounding is off by one, the product is wrong.</a:t>
+              <a:t>The inverse step also divides by the length.</a:t>
+            </a:r>
+          </a:p>
+          <a:p>
+            <a:pPr>
+              <a:spcAft>
+                <a:spcPts val="1400"/>
+              </a:spcAft>
+            </a:pPr>
+            <a:r>
+              <a:rPr sz="2600" b="0">
+                <a:solidFill>
+                  <a:srgbClr val="1C1917"/>
+                </a:solidFill>
+                <a:latin typeface="Calibri"/>
+              </a:rPr>
+              <a:t>Without that scale, every coefficient is too big by the length.</a:t>
             </a:r>
           </a:p>
         </p:txBody>
@@ -4605,7 +4201,7 @@
     <p:bg>
       <p:bgPr>
         <a:solidFill>
-          <a:srgbClr val="FFFFFF"/>
+          <a:srgbClr val="FFFCF7"/>
         </a:solidFill>
         <a:effectLst/>
       </p:bgPr>
@@ -4625,8 +4221,8 @@
         </p:nvSpPr>
         <p:spPr>
           <a:xfrm>
-            <a:off x="502920" y="292608"/>
-            <a:ext cx="11155680" cy="960120"/>
+            <a:off x="411480" y="201168"/>
+            <a:ext cx="11338560" cy="640080"/>
           </a:xfrm>
           <a:prstGeom prst="rect">
             <a:avLst/>
@@ -4640,27 +4236,51 @@
           <a:lstStyle/>
           <a:p>
             <a:r>
-              <a:rPr sz="3200">
-                <a:solidFill>
-                  <a:srgbClr val="141414"/>
+              <a:rPr sz="3000" b="1">
+                <a:solidFill>
+                  <a:srgbClr val="1C1917"/>
                 </a:solidFill>
                 <a:latin typeface="Calibri"/>
               </a:rPr>
-              <a:t>OpenAI file</a:t>
-            </a:r>
-          </a:p>
-        </p:txBody>
-      </p:sp>
-      <p:sp>
-        <p:nvSpPr>
-          <p:cNvPr id="3" name="TextBox 2"/>
+              <a:t>Harness times, through 16,384 limbs</a:t>
+            </a:r>
+          </a:p>
+        </p:txBody>
+      </p:sp>
+      <p:pic>
+        <p:nvPicPr>
+          <p:cNvPr id="3" name="Picture 2" descr="graph.png"/>
+          <p:cNvPicPr>
+            <a:picLocks noChangeAspect="1"/>
+          </p:cNvPicPr>
+          <p:nvPr/>
+        </p:nvPicPr>
+        <p:blipFill>
+          <a:blip r:embed="rId2"/>
+          <a:stretch>
+            <a:fillRect/>
+          </a:stretch>
+        </p:blipFill>
+        <p:spPr>
+          <a:xfrm>
+            <a:off x="640080" y="960120"/>
+            <a:ext cx="10881360" cy="6114601"/>
+          </a:xfrm>
+          <a:prstGeom prst="rect">
+            <a:avLst/>
+          </a:prstGeom>
+        </p:spPr>
+      </p:pic>
+      <p:sp>
+        <p:nvSpPr>
+          <p:cNvPr id="4" name="TextBox 3"/>
           <p:cNvSpPr txBox="1"/>
           <p:nvPr/>
         </p:nvSpPr>
         <p:spPr>
           <a:xfrm>
-            <a:off x="502920" y="1417320"/>
-            <a:ext cx="11064240" cy="4937760"/>
+            <a:off x="411480" y="6263640"/>
+            <a:ext cx="11338560" cy="457200"/>
           </a:xfrm>
           <a:prstGeom prst="rect">
             <a:avLst/>
@@ -4673,67 +4293,14 @@
           </a:bodyPr>
           <a:lstStyle/>
           <a:p>
-            <a:pPr>
-              <a:spcAft>
-                <a:spcPts val="1000"/>
-              </a:spcAft>
-            </a:pPr>
-            <a:r>
-              <a:rPr sz="2200">
-                <a:solidFill>
-                  <a:srgbClr val="141414"/>
+            <a:r>
+              <a:rPr sz="1600" b="0">
+                <a:solidFill>
+                  <a:srgbClr val="57534E"/>
                 </a:solidFill>
                 <a:latin typeface="Calibri"/>
               </a:rPr>
-              <a:t>The preprint's fast machine uses schoolbook below a huge cutoff.</a:t>
-            </a:r>
-          </a:p>
-          <a:p>
-            <a:pPr>
-              <a:spcAft>
-                <a:spcPts val="1000"/>
-              </a:spcAft>
-            </a:pPr>
-            <a:r>
-              <a:rPr sz="2200">
-                <a:solidFill>
-                  <a:srgbClr val="141414"/>
-                </a:solidFill>
-                <a:latin typeface="Calibri"/>
-              </a:rPr>
-              <a:t>We do not run that machine.</a:t>
-            </a:r>
-          </a:p>
-          <a:p>
-            <a:pPr>
-              <a:spcAft>
-                <a:spcPts val="1000"/>
-              </a:spcAft>
-            </a:pPr>
-            <a:r>
-              <a:rPr sz="2200">
-                <a:solidFill>
-                  <a:srgbClr val="141414"/>
-                </a:solidFill>
-                <a:latin typeface="Calibri"/>
-              </a:rPr>
-              <a:t>This file: four 16-bit digits per limb.</a:t>
-            </a:r>
-          </a:p>
-          <a:p>
-            <a:pPr>
-              <a:spcAft>
-                <a:spcPts val="1000"/>
-              </a:spcAft>
-            </a:pPr>
-            <a:r>
-              <a:rPr sz="2200">
-                <a:solidFill>
-                  <a:srgbClr val="141414"/>
-                </a:solidFill>
-                <a:latin typeface="Calibri"/>
-              </a:rPr>
-              <a:t>Convolve mod 2^64 - 2^32 + 1, then carry.</a:t>
+              <a:t>Same run, after Karatsuba was merged. Dashed lines mark 4,096 and 8,192 limbs.</a:t>
             </a:r>
           </a:p>
         </p:txBody>
@@ -4752,7 +4319,7 @@
     <p:bg>
       <p:bgPr>
         <a:solidFill>
-          <a:srgbClr val="FFFFFF"/>
+          <a:srgbClr val="FFFCF7"/>
         </a:solidFill>
         <a:effectLst/>
       </p:bgPr>
@@ -4772,8 +4339,8 @@
         </p:nvSpPr>
         <p:spPr>
           <a:xfrm>
-            <a:off x="502920" y="292608"/>
-            <a:ext cx="11155680" cy="960120"/>
+            <a:off x="411480" y="201168"/>
+            <a:ext cx="11338560" cy="640080"/>
           </a:xfrm>
           <a:prstGeom prst="rect">
             <a:avLst/>
@@ -4787,13 +4354,13 @@
           <a:lstStyle/>
           <a:p>
             <a:r>
-              <a:rPr sz="3200">
-                <a:solidFill>
-                  <a:srgbClr val="141414"/>
+              <a:rPr sz="3000" b="1">
+                <a:solidFill>
+                  <a:srgbClr val="1C1917"/>
                 </a:solidFill>
                 <a:latin typeface="Calibri"/>
               </a:rPr>
-              <a:t>What breaks</a:t>
+              <a:t>Where mine is faster</a:t>
             </a:r>
           </a:p>
         </p:txBody>
@@ -4806,8 +4373,8 @@
         </p:nvSpPr>
         <p:spPr>
           <a:xfrm>
-            <a:off x="502920" y="1417320"/>
-            <a:ext cx="11064240" cy="4937760"/>
+            <a:off x="548640" y="1188720"/>
+            <a:ext cx="11064240" cy="5120640"/>
           </a:xfrm>
           <a:prstGeom prst="rect">
             <a:avLst/>
@@ -4822,81 +4389,97 @@
           <a:p>
             <a:pPr>
               <a:spcAft>
-                <a:spcPts val="1000"/>
+                <a:spcPts val="1400"/>
               </a:spcAft>
             </a:pPr>
             <a:r>
-              <a:rPr sz="2200">
-                <a:solidFill>
-                  <a:srgbClr val="141414"/>
+              <a:rPr sz="2200" b="0">
+                <a:solidFill>
+                  <a:srgbClr val="1C1917"/>
                 </a:solidFill>
                 <a:latin typeface="Calibri"/>
               </a:rPr>
-              <a:t>Digits 3, 5 times 7, 11.</a:t>
+              <a:t>GMP is fastest on every row. At 16,384 limbs it is about 17 times faster than mine.</a:t>
             </a:r>
           </a:p>
           <a:p>
             <a:pPr>
               <a:spcAft>
-                <a:spcPts val="1000"/>
+                <a:spcPts val="1400"/>
               </a:spcAft>
             </a:pPr>
             <a:r>
-              <a:rPr sz="2200">
-                <a:solidFill>
-                  <a:srgbClr val="141414"/>
+              <a:rPr sz="2200" b="0">
+                <a:solidFill>
+                  <a:srgbClr val="1C1917"/>
                 </a:solidFill>
                 <a:latin typeface="Calibri"/>
               </a:rPr>
-              <a:t>Places should be 21, 68, 55.</a:t>
+              <a:t>Karatsuba is faster than mine at every size in this table.</a:t>
             </a:r>
           </a:p>
           <a:p>
             <a:pPr>
               <a:spcAft>
-                <a:spcPts val="1000"/>
+                <a:spcPts val="1400"/>
               </a:spcAft>
             </a:pPr>
             <a:r>
-              <a:rPr sz="2200">
-                <a:solidFill>
-                  <a:srgbClr val="141414"/>
+              <a:rPr sz="2200" b="0">
+                <a:solidFill>
+                  <a:srgbClr val="1C1917"/>
                 </a:solidFill>
                 <a:latin typeface="Calibri"/>
               </a:rPr>
-              <a:t>Length 2 adds 55 onto 21 and gives 76.</a:t>
+              <a:t>I pass schoolbook at 4,096 limbs: 9.6 ms against 14.9 ms.</a:t>
             </a:r>
           </a:p>
           <a:p>
             <a:pPr>
               <a:spcAft>
-                <a:spcPts val="1000"/>
+                <a:spcPts val="1400"/>
               </a:spcAft>
             </a:pPr>
             <a:r>
-              <a:rPr sz="2200">
-                <a:solidFill>
-                  <a:srgbClr val="141414"/>
+              <a:rPr sz="2200" b="0">
+                <a:solidFill>
+                  <a:srgbClr val="1C1917"/>
                 </a:solidFill>
                 <a:latin typeface="Calibri"/>
               </a:rPr>
-              <a:t>Length must be at least twice the digit count.</a:t>
+              <a:t>I am still behind schoolbook at 2,048 limbs: 4.3 ms against 3.6 ms.</a:t>
             </a:r>
           </a:p>
           <a:p>
             <a:pPr>
               <a:spcAft>
-                <a:spcPts val="1000"/>
+                <a:spcPts val="1400"/>
               </a:spcAft>
             </a:pPr>
             <a:r>
-              <a:rPr sz="2200">
-                <a:solidFill>
-                  <a:srgbClr val="141414"/>
+              <a:rPr sz="2200" b="0">
+                <a:solidFill>
+                  <a:srgbClr val="1C1917"/>
                 </a:solidFill>
                 <a:latin typeface="Calibri"/>
               </a:rPr>
-              <a:t>The inverse transform must divide by that length.</a:t>
+              <a:t>I am still behind the FFT at 8,192 limbs: 20.1 ms against 11.4 ms.</a:t>
+            </a:r>
+          </a:p>
+          <a:p>
+            <a:pPr>
+              <a:spcAft>
+                <a:spcPts val="1400"/>
+              </a:spcAft>
+            </a:pPr>
+            <a:r>
+              <a:rPr sz="2200" b="0">
+                <a:solidFill>
+                  <a:srgbClr val="1C1917"/>
+                </a:solidFill>
+                <a:latin typeface="Calibri"/>
+              </a:rPr>
+              <a:t>At 16,384 limbs I edge the FFT: 44.1 ms against 47.5 ms. Karatsuba is 18.4 ms. GMP is 2.6 ms.</a:t>
             </a:r>
           </a:p>
         </p:txBody>
